--- a/media/module3/slides.pptx
+++ b/media/module3/slides.pptx
@@ -3109,8 +3109,8 @@
         </p:nvSpPr>
         <p:spPr>
           <a:xfrm>
-            <a:off x="548640" y="2011680"/>
-            <a:ext cx="11064240" cy="2286000"/>
+            <a:off x="548640" y="1828800"/>
+            <a:ext cx="11064240" cy="2743200"/>
           </a:xfrm>
           <a:prstGeom prst="rect">
             <a:avLst/>
@@ -3119,15 +3119,22 @@
         </p:spPr>
         <p:txBody>
           <a:bodyPr wrap="square">
-            <a:spAutoFit/>
+            <a:noAutofit/>
           </a:bodyPr>
           <a:lstStyle/>
           <a:p>
             <a:pPr algn="ctr">
-              <a:defRPr sz="4400" b="1">
+              <a:lnSpc>
+                <a:spcPts val="2200"/>
+              </a:lnSpc>
+              <a:spcAft>
+                <a:spcPts val="400"/>
+              </a:spcAft>
+              <a:defRPr sz="4000" b="1">
                 <a:solidFill>
                   <a:srgbClr val="1A1A2E"/>
                 </a:solidFill>
+                <a:latin typeface="Calibri"/>
               </a:defRPr>
             </a:pPr>
             <a:r>
@@ -3136,13 +3143,17 @@
           </a:p>
           <a:p>
             <a:pPr algn="ctr">
+              <a:lnSpc>
+                <a:spcPts val="2200"/>
+              </a:lnSpc>
               <a:spcBef>
-                <a:spcPts val="1200"/>
+                <a:spcPts val="1400"/>
               </a:spcBef>
-              <a:defRPr sz="3200">
+              <a:defRPr sz="2600" b="0">
                 <a:solidFill>
                   <a:srgbClr val="333333"/>
                 </a:solidFill>
+                <a:latin typeface="Calibri"/>
               </a:defRPr>
             </a:pPr>
             <a:r>
@@ -3168,16 +3179,20 @@
           <a:noFill/>
         </p:spPr>
         <p:txBody>
-          <a:bodyPr wrap="none">
-            <a:spAutoFit/>
+          <a:bodyPr wrap="square">
+            <a:noAutofit/>
           </a:bodyPr>
           <a:lstStyle/>
           <a:p>
             <a:pPr algn="r">
-              <a:defRPr sz="1000">
+              <a:lnSpc>
+                <a:spcPts val="2200"/>
+              </a:lnSpc>
+              <a:defRPr sz="1000" b="0">
                 <a:solidFill>
                   <a:srgbClr val="666666"/>
                 </a:solidFill>
+                <a:latin typeface="Calibri"/>
               </a:defRPr>
             </a:pPr>
             <a:r>
@@ -3212,8 +3227,8 @@
         </p:nvSpPr>
         <p:spPr>
           <a:xfrm>
-            <a:off x="548640" y="457200"/>
-            <a:ext cx="11064240" cy="731520"/>
+            <a:off x="548640" y="411480"/>
+            <a:ext cx="11064240" cy="777240"/>
           </a:xfrm>
           <a:prstGeom prst="rect">
             <a:avLst/>
@@ -3221,16 +3236,20 @@
           <a:noFill/>
         </p:spPr>
         <p:txBody>
-          <a:bodyPr wrap="none">
-            <a:spAutoFit/>
+          <a:bodyPr wrap="square">
+            <a:noAutofit/>
           </a:bodyPr>
           <a:lstStyle/>
           <a:p>
             <a:pPr>
-              <a:defRPr sz="3200" b="1">
+              <a:lnSpc>
+                <a:spcPts val="2200"/>
+              </a:lnSpc>
+              <a:defRPr sz="2800" b="1">
                 <a:solidFill>
                   <a:srgbClr val="1A1A2E"/>
                 </a:solidFill>
+                <a:latin typeface="Calibri"/>
               </a:defRPr>
             </a:pPr>
             <a:r>
@@ -3247,27 +3266,76 @@
         </p:nvSpPr>
         <p:spPr>
           <a:xfrm>
-            <a:off x="548640" y="1143000"/>
-            <a:ext cx="11064240" cy="548640"/>
+            <a:off x="548640" y="1051560"/>
+            <a:ext cx="11064240" cy="914400"/>
           </a:xfrm>
           <a:prstGeom prst="rect">
             <a:avLst/>
           </a:prstGeom>
-          <a:noFill/>
-        </p:spPr>
-        <p:txBody>
-          <a:bodyPr wrap="none">
-            <a:spAutoFit/>
+          <a:solidFill>
+            <a:srgbClr val="F4F4F4"/>
+          </a:solidFill>
+        </p:spPr>
+        <p:txBody>
+          <a:bodyPr wrap="square">
+            <a:noAutofit/>
           </a:bodyPr>
           <a:lstStyle/>
           <a:p>
             <a:pPr>
-              <a:defRPr sz="1400">
+              <a:lnSpc>
+                <a:spcPts val="2200"/>
+              </a:lnSpc>
+              <a:spcAft>
+                <a:spcPts val="200"/>
+              </a:spcAft>
+              <a:defRPr sz="2000" b="0">
+                <a:solidFill>
+                  <a:srgbClr val="333333"/>
+                </a:solidFill>
                 <a:latin typeface="Consolas"/>
               </a:defRPr>
             </a:pPr>
             <a:r>
-              <a:t>$ cd module3/examples/redirection &amp;&amp; chmod u+x print_both.sh &amp;&amp; ./print_both.sh &gt; /tmp/m3_out.log 2&gt; /tmp/m3_err.log &amp;&amp; head -2 /tmp/m3_out.log</a:t>
+              <a:t>$ cd module3/examples/redirection &amp;&amp; chmod u+x print_both.sh &amp;&amp;</a:t>
+            </a:r>
+          </a:p>
+          <a:p>
+            <a:pPr>
+              <a:lnSpc>
+                <a:spcPts val="2200"/>
+              </a:lnSpc>
+              <a:spcAft>
+                <a:spcPts val="200"/>
+              </a:spcAft>
+              <a:defRPr sz="2000" b="0">
+                <a:solidFill>
+                  <a:srgbClr val="333333"/>
+                </a:solidFill>
+                <a:latin typeface="Consolas"/>
+              </a:defRPr>
+            </a:pPr>
+            <a:r>
+              <a:t>      ./print_both.sh &gt; /tmp/m3_out.log 2&gt; /tmp/m3_err.log &amp;&amp; head -2</a:t>
+            </a:r>
+          </a:p>
+          <a:p>
+            <a:pPr>
+              <a:lnSpc>
+                <a:spcPts val="2200"/>
+              </a:lnSpc>
+              <a:spcAft>
+                <a:spcPts val="200"/>
+              </a:spcAft>
+              <a:defRPr sz="2000" b="0">
+                <a:solidFill>
+                  <a:srgbClr val="333333"/>
+                </a:solidFill>
+                <a:latin typeface="Consolas"/>
+              </a:defRPr>
+            </a:pPr>
+            <a:r>
+              <a:t>      /tmp/m3_out.log</a:t>
             </a:r>
           </a:p>
         </p:txBody>
@@ -3288,8 +3356,8 @@
         </p:blipFill>
         <p:spPr>
           <a:xfrm>
-            <a:off x="548640" y="1828800"/>
-            <a:ext cx="11064240" cy="3840480"/>
+            <a:off x="548640" y="1965960"/>
+            <a:ext cx="7071358" cy="3977639"/>
           </a:xfrm>
           <a:prstGeom prst="rect">
             <a:avLst/>
@@ -3313,16 +3381,20 @@
           <a:noFill/>
         </p:spPr>
         <p:txBody>
-          <a:bodyPr wrap="none">
-            <a:spAutoFit/>
+          <a:bodyPr wrap="square">
+            <a:noAutofit/>
           </a:bodyPr>
           <a:lstStyle/>
           <a:p>
             <a:pPr algn="r">
-              <a:defRPr sz="1000">
+              <a:lnSpc>
+                <a:spcPts val="2200"/>
+              </a:lnSpc>
+              <a:defRPr sz="1000" b="0">
                 <a:solidFill>
                   <a:srgbClr val="666666"/>
                 </a:solidFill>
+                <a:latin typeface="Calibri"/>
               </a:defRPr>
             </a:pPr>
             <a:r>
@@ -3366,13 +3438,21 @@
           <a:noFill/>
         </p:spPr>
         <p:txBody>
-          <a:bodyPr wrap="none">
-            <a:spAutoFit/>
+          <a:bodyPr wrap="square">
+            <a:noAutofit/>
           </a:bodyPr>
           <a:lstStyle/>
           <a:p>
             <a:pPr algn="ctr">
-              <a:defRPr sz="4000" b="1"/>
+              <a:lnSpc>
+                <a:spcPts val="2200"/>
+              </a:lnSpc>
+              <a:defRPr sz="3600" b="1">
+                <a:solidFill>
+                  <a:srgbClr val="1A1A2E"/>
+                </a:solidFill>
+                <a:latin typeface="Calibri"/>
+              </a:defRPr>
             </a:pPr>
             <a:r>
               <a:t>Practice</a:t>
@@ -3397,16 +3477,20 @@
           <a:noFill/>
         </p:spPr>
         <p:txBody>
-          <a:bodyPr wrap="none">
-            <a:spAutoFit/>
+          <a:bodyPr wrap="square">
+            <a:noAutofit/>
           </a:bodyPr>
           <a:lstStyle/>
           <a:p>
             <a:pPr algn="r">
-              <a:defRPr sz="1000">
+              <a:lnSpc>
+                <a:spcPts val="2200"/>
+              </a:lnSpc>
+              <a:defRPr sz="1000" b="0">
                 <a:solidFill>
                   <a:srgbClr val="666666"/>
                 </a:solidFill>
+                <a:latin typeface="Calibri"/>
               </a:defRPr>
             </a:pPr>
             <a:r>
@@ -3441,8 +3525,8 @@
         </p:nvSpPr>
         <p:spPr>
           <a:xfrm>
-            <a:off x="548640" y="457200"/>
-            <a:ext cx="11064240" cy="731520"/>
+            <a:off x="548640" y="411480"/>
+            <a:ext cx="11064240" cy="777240"/>
           </a:xfrm>
           <a:prstGeom prst="rect">
             <a:avLst/>
@@ -3450,16 +3534,20 @@
           <a:noFill/>
         </p:spPr>
         <p:txBody>
-          <a:bodyPr wrap="none">
-            <a:spAutoFit/>
+          <a:bodyPr wrap="square">
+            <a:noAutofit/>
           </a:bodyPr>
           <a:lstStyle/>
           <a:p>
             <a:pPr>
-              <a:defRPr sz="3200" b="1">
+              <a:lnSpc>
+                <a:spcPts val="2200"/>
+              </a:lnSpc>
+              <a:defRPr sz="2800" b="1">
                 <a:solidFill>
                   <a:srgbClr val="1A1A2E"/>
                 </a:solidFill>
+                <a:latin typeface="Calibri"/>
               </a:defRPr>
             </a:pPr>
             <a:r>
@@ -3476,7 +3564,7 @@
         </p:nvSpPr>
         <p:spPr>
           <a:xfrm>
-            <a:off x="548640" y="1234440"/>
+            <a:off x="548640" y="1143000"/>
             <a:ext cx="11064240" cy="5029200"/>
           </a:xfrm>
           <a:prstGeom prst="rect">
@@ -3488,12 +3576,18 @@
         </p:spPr>
         <p:txBody>
           <a:bodyPr wrap="square">
-            <a:spAutoFit/>
+            <a:noAutofit/>
           </a:bodyPr>
           <a:lstStyle/>
           <a:p>
             <a:pPr>
-              <a:defRPr sz="1400">
+              <a:lnSpc>
+                <a:spcPts val="2200"/>
+              </a:lnSpc>
+              <a:spcAft>
+                <a:spcPts val="400"/>
+              </a:spcAft>
+              <a:defRPr sz="2000" b="0">
                 <a:solidFill>
                   <a:srgbClr val="333333"/>
                 </a:solidFill>
@@ -3523,16 +3617,20 @@
           <a:noFill/>
         </p:spPr>
         <p:txBody>
-          <a:bodyPr wrap="none">
-            <a:spAutoFit/>
+          <a:bodyPr wrap="square">
+            <a:noAutofit/>
           </a:bodyPr>
           <a:lstStyle/>
           <a:p>
             <a:pPr algn="r">
-              <a:defRPr sz="1000">
+              <a:lnSpc>
+                <a:spcPts val="2200"/>
+              </a:lnSpc>
+              <a:defRPr sz="1000" b="0">
                 <a:solidFill>
                   <a:srgbClr val="666666"/>
                 </a:solidFill>
+                <a:latin typeface="Calibri"/>
               </a:defRPr>
             </a:pPr>
             <a:r>
@@ -3567,8 +3665,8 @@
         </p:nvSpPr>
         <p:spPr>
           <a:xfrm>
-            <a:off x="548640" y="457200"/>
-            <a:ext cx="11064240" cy="731520"/>
+            <a:off x="548640" y="411480"/>
+            <a:ext cx="11064240" cy="777240"/>
           </a:xfrm>
           <a:prstGeom prst="rect">
             <a:avLst/>
@@ -3576,16 +3674,20 @@
           <a:noFill/>
         </p:spPr>
         <p:txBody>
-          <a:bodyPr wrap="none">
-            <a:spAutoFit/>
+          <a:bodyPr wrap="square">
+            <a:noAutofit/>
           </a:bodyPr>
           <a:lstStyle/>
           <a:p>
             <a:pPr>
-              <a:defRPr sz="3200" b="1">
+              <a:lnSpc>
+                <a:spcPts val="2200"/>
+              </a:lnSpc>
+              <a:defRPr sz="2800" b="1">
                 <a:solidFill>
                   <a:srgbClr val="1A1A2E"/>
                 </a:solidFill>
+                <a:latin typeface="Calibri"/>
               </a:defRPr>
             </a:pPr>
             <a:r>
@@ -3602,8 +3704,8 @@
         </p:nvSpPr>
         <p:spPr>
           <a:xfrm>
-            <a:off x="548640" y="1280160"/>
-            <a:ext cx="11064240" cy="4754880"/>
+            <a:off x="548640" y="1234440"/>
+            <a:ext cx="11064240" cy="4937760"/>
           </a:xfrm>
           <a:prstGeom prst="rect">
             <a:avLst/>
@@ -3612,52 +3714,64 @@
         </p:spPr>
         <p:txBody>
           <a:bodyPr wrap="square">
-            <a:spAutoFit/>
+            <a:noAutofit/>
           </a:bodyPr>
           <a:lstStyle/>
           <a:p>
             <a:pPr>
+              <a:lnSpc>
+                <a:spcPts val="2200"/>
+              </a:lnSpc>
               <a:spcAft>
-                <a:spcPts val="800"/>
+                <a:spcPts val="1000"/>
               </a:spcAft>
-              <a:defRPr sz="2000">
+              <a:defRPr sz="2000" b="0">
                 <a:solidFill>
                   <a:srgbClr val="333333"/>
                 </a:solidFill>
+                <a:latin typeface="Calibri"/>
               </a:defRPr>
             </a:pPr>
             <a:r>
-              <a:t>grep ERROR on ~/unix_practice/sample.log</a:t>
+              <a:t>• grep ERROR on ~/unix_practice/sample.log</a:t>
             </a:r>
           </a:p>
           <a:p>
             <a:pPr>
+              <a:lnSpc>
+                <a:spcPts val="2200"/>
+              </a:lnSpc>
               <a:spcAft>
-                <a:spcPts val="800"/>
+                <a:spcPts val="1000"/>
               </a:spcAft>
-              <a:defRPr sz="2000">
+              <a:defRPr sz="2000" b="0">
                 <a:solidFill>
                   <a:srgbClr val="333333"/>
                 </a:solidFill>
+                <a:latin typeface="Calibri"/>
               </a:defRPr>
             </a:pPr>
             <a:r>
-              <a:t>Try 2&gt;&amp;1 | tee debug.log</a:t>
+              <a:t>• Try 2&gt;&amp;1 | tee debug.log</a:t>
             </a:r>
           </a:p>
           <a:p>
             <a:pPr>
+              <a:lnSpc>
+                <a:spcPts val="2200"/>
+              </a:lnSpc>
               <a:spcAft>
-                <a:spcPts val="800"/>
+                <a:spcPts val="1000"/>
               </a:spcAft>
-              <a:defRPr sz="2000">
+              <a:defRPr sz="2000" b="0">
                 <a:solidFill>
                   <a:srgbClr val="333333"/>
                 </a:solidFill>
+                <a:latin typeface="Calibri"/>
               </a:defRPr>
             </a:pPr>
             <a:r>
-              <a:t>Check echo $? after a command</a:t>
+              <a:t>• Check echo $? after a command</a:t>
             </a:r>
           </a:p>
         </p:txBody>
@@ -3679,16 +3793,20 @@
           <a:noFill/>
         </p:spPr>
         <p:txBody>
-          <a:bodyPr wrap="none">
-            <a:spAutoFit/>
+          <a:bodyPr wrap="square">
+            <a:noAutofit/>
           </a:bodyPr>
           <a:lstStyle/>
           <a:p>
             <a:pPr algn="r">
-              <a:defRPr sz="1000">
+              <a:lnSpc>
+                <a:spcPts val="2200"/>
+              </a:lnSpc>
+              <a:defRPr sz="1000" b="0">
                 <a:solidFill>
                   <a:srgbClr val="666666"/>
                 </a:solidFill>
+                <a:latin typeface="Calibri"/>
               </a:defRPr>
             </a:pPr>
             <a:r>
@@ -3723,8 +3841,8 @@
         </p:nvSpPr>
         <p:spPr>
           <a:xfrm>
-            <a:off x="548640" y="457200"/>
-            <a:ext cx="11064240" cy="731520"/>
+            <a:off x="548640" y="411480"/>
+            <a:ext cx="11064240" cy="777240"/>
           </a:xfrm>
           <a:prstGeom prst="rect">
             <a:avLst/>
@@ -3732,16 +3850,20 @@
           <a:noFill/>
         </p:spPr>
         <p:txBody>
-          <a:bodyPr wrap="none">
-            <a:spAutoFit/>
+          <a:bodyPr wrap="square">
+            <a:noAutofit/>
           </a:bodyPr>
           <a:lstStyle/>
           <a:p>
             <a:pPr>
-              <a:defRPr sz="3200" b="1">
+              <a:lnSpc>
+                <a:spcPts val="2200"/>
+              </a:lnSpc>
+              <a:defRPr sz="2800" b="1">
                 <a:solidFill>
                   <a:srgbClr val="1A1A2E"/>
                 </a:solidFill>
+                <a:latin typeface="Calibri"/>
               </a:defRPr>
             </a:pPr>
             <a:r>
@@ -3758,8 +3880,8 @@
         </p:nvSpPr>
         <p:spPr>
           <a:xfrm>
-            <a:off x="548640" y="1280160"/>
-            <a:ext cx="11064240" cy="4754880"/>
+            <a:off x="548640" y="1234440"/>
+            <a:ext cx="11064240" cy="4937760"/>
           </a:xfrm>
           <a:prstGeom prst="rect">
             <a:avLst/>
@@ -3768,67 +3890,83 @@
         </p:spPr>
         <p:txBody>
           <a:bodyPr wrap="square">
-            <a:spAutoFit/>
+            <a:noAutofit/>
           </a:bodyPr>
           <a:lstStyle/>
           <a:p>
             <a:pPr>
+              <a:lnSpc>
+                <a:spcPts val="2200"/>
+              </a:lnSpc>
               <a:spcAft>
-                <a:spcPts val="800"/>
+                <a:spcPts val="1000"/>
               </a:spcAft>
-              <a:defRPr sz="2000">
+              <a:defRPr sz="2000" b="0">
                 <a:solidFill>
                   <a:srgbClr val="333333"/>
                 </a:solidFill>
+                <a:latin typeface="Calibri"/>
               </a:defRPr>
             </a:pPr>
             <a:r>
-              <a:t>Processes and exit status</a:t>
+              <a:t>• Processes and exit status</a:t>
             </a:r>
           </a:p>
           <a:p>
             <a:pPr>
+              <a:lnSpc>
+                <a:spcPts val="2200"/>
+              </a:lnSpc>
               <a:spcAft>
-                <a:spcPts val="800"/>
+                <a:spcPts val="1000"/>
               </a:spcAft>
-              <a:defRPr sz="2000">
+              <a:defRPr sz="2000" b="0">
                 <a:solidFill>
                   <a:srgbClr val="333333"/>
                 </a:solidFill>
+                <a:latin typeface="Calibri"/>
               </a:defRPr>
             </a:pPr>
             <a:r>
-              <a:t>Redirection and pipes</a:t>
+              <a:t>• Redirection and pipes</a:t>
             </a:r>
           </a:p>
           <a:p>
             <a:pPr>
+              <a:lnSpc>
+                <a:spcPts val="2200"/>
+              </a:lnSpc>
               <a:spcAft>
-                <a:spcPts val="800"/>
+                <a:spcPts val="1000"/>
               </a:spcAft>
-              <a:defRPr sz="2000">
+              <a:defRPr sz="2000" b="0">
                 <a:solidFill>
                   <a:srgbClr val="333333"/>
                 </a:solidFill>
+                <a:latin typeface="Calibri"/>
               </a:defRPr>
             </a:pPr>
             <a:r>
-              <a:t>Next: Module 4 — shell scripting</a:t>
+              <a:t>• Next: Module 4 — shell scripting</a:t>
             </a:r>
           </a:p>
           <a:p>
             <a:pPr>
+              <a:lnSpc>
+                <a:spcPts val="2200"/>
+              </a:lnSpc>
               <a:spcAft>
-                <a:spcPts val="800"/>
+                <a:spcPts val="1000"/>
               </a:spcAft>
-              <a:defRPr sz="2000">
+              <a:defRPr sz="2000" b="0">
                 <a:solidFill>
                   <a:srgbClr val="333333"/>
                 </a:solidFill>
+                <a:latin typeface="Calibri"/>
               </a:defRPr>
             </a:pPr>
             <a:r>
-              <a:t>Next: Module 4: Shell Productivity &amp; Basic Scripting</a:t>
+              <a:t>• Next: Module 4: Shell Productivity &amp; Basic Scripting</a:t>
             </a:r>
           </a:p>
         </p:txBody>
@@ -3850,16 +3988,20 @@
           <a:noFill/>
         </p:spPr>
         <p:txBody>
-          <a:bodyPr wrap="none">
-            <a:spAutoFit/>
+          <a:bodyPr wrap="square">
+            <a:noAutofit/>
           </a:bodyPr>
           <a:lstStyle/>
           <a:p>
             <a:pPr algn="r">
-              <a:defRPr sz="1000">
+              <a:lnSpc>
+                <a:spcPts val="2200"/>
+              </a:lnSpc>
+              <a:defRPr sz="1000" b="0">
                 <a:solidFill>
                   <a:srgbClr val="666666"/>
                 </a:solidFill>
+                <a:latin typeface="Calibri"/>
               </a:defRPr>
             </a:pPr>
             <a:r>
@@ -3894,8 +4036,8 @@
         </p:nvSpPr>
         <p:spPr>
           <a:xfrm>
-            <a:off x="548640" y="457200"/>
-            <a:ext cx="11064240" cy="731520"/>
+            <a:off x="548640" y="411480"/>
+            <a:ext cx="11064240" cy="777240"/>
           </a:xfrm>
           <a:prstGeom prst="rect">
             <a:avLst/>
@@ -3903,16 +4045,20 @@
           <a:noFill/>
         </p:spPr>
         <p:txBody>
-          <a:bodyPr wrap="none">
-            <a:spAutoFit/>
+          <a:bodyPr wrap="square">
+            <a:noAutofit/>
           </a:bodyPr>
           <a:lstStyle/>
           <a:p>
             <a:pPr>
-              <a:defRPr sz="3200" b="1">
+              <a:lnSpc>
+                <a:spcPts val="2200"/>
+              </a:lnSpc>
+              <a:defRPr sz="2800" b="1">
                 <a:solidFill>
                   <a:srgbClr val="1A1A2E"/>
                 </a:solidFill>
+                <a:latin typeface="Calibri"/>
               </a:defRPr>
             </a:pPr>
             <a:r>
@@ -3929,8 +4075,8 @@
         </p:nvSpPr>
         <p:spPr>
           <a:xfrm>
-            <a:off x="548640" y="1280160"/>
-            <a:ext cx="11064240" cy="4754880"/>
+            <a:off x="548640" y="1234440"/>
+            <a:ext cx="11064240" cy="4937760"/>
           </a:xfrm>
           <a:prstGeom prst="rect">
             <a:avLst/>
@@ -3939,67 +4085,83 @@
         </p:spPr>
         <p:txBody>
           <a:bodyPr wrap="square">
-            <a:spAutoFit/>
+            <a:noAutofit/>
           </a:bodyPr>
           <a:lstStyle/>
           <a:p>
             <a:pPr>
+              <a:lnSpc>
+                <a:spcPts val="2200"/>
+              </a:lnSpc>
               <a:spcAft>
-                <a:spcPts val="800"/>
+                <a:spcPts val="1000"/>
               </a:spcAft>
-              <a:defRPr sz="2000">
+              <a:defRPr sz="2000" b="0">
                 <a:solidFill>
                   <a:srgbClr val="333333"/>
                 </a:solidFill>
+                <a:latin typeface="Calibri"/>
               </a:defRPr>
             </a:pPr>
             <a:r>
-              <a:t>Stop foreground jobs with Ctrl+C</a:t>
+              <a:t>• Stop foreground jobs with Ctrl+C</a:t>
             </a:r>
           </a:p>
           <a:p>
             <a:pPr>
+              <a:lnSpc>
+                <a:spcPts val="2200"/>
+              </a:lnSpc>
               <a:spcAft>
-                <a:spcPts val="800"/>
+                <a:spcPts val="1000"/>
               </a:spcAft>
-              <a:defRPr sz="2000">
+              <a:defRPr sz="2000" b="0">
                 <a:solidFill>
                   <a:srgbClr val="333333"/>
                 </a:solidFill>
+                <a:latin typeface="Calibri"/>
               </a:defRPr>
             </a:pPr>
             <a:r>
-              <a:t>Redirect stdout/stderr to log files</a:t>
+              <a:t>• Redirect stdout/stderr to log files</a:t>
             </a:r>
           </a:p>
           <a:p>
             <a:pPr>
+              <a:lnSpc>
+                <a:spcPts val="2200"/>
+              </a:lnSpc>
               <a:spcAft>
-                <a:spcPts val="800"/>
+                <a:spcPts val="1000"/>
               </a:spcAft>
-              <a:defRPr sz="2000">
+              <a:defRPr sz="2000" b="0">
                 <a:solidFill>
                   <a:srgbClr val="333333"/>
                 </a:solidFill>
+                <a:latin typeface="Calibri"/>
               </a:defRPr>
             </a:pPr>
             <a:r>
-              <a:t>Chain commands with pipes</a:t>
+              <a:t>• Chain commands with pipes</a:t>
             </a:r>
           </a:p>
           <a:p>
             <a:pPr>
+              <a:lnSpc>
+                <a:spcPts val="2200"/>
+              </a:lnSpc>
               <a:spcAft>
-                <a:spcPts val="800"/>
+                <a:spcPts val="1000"/>
               </a:spcAft>
-              <a:defRPr sz="2000">
+              <a:defRPr sz="2000" b="0">
                 <a:solidFill>
                   <a:srgbClr val="333333"/>
                 </a:solidFill>
+                <a:latin typeface="Calibri"/>
               </a:defRPr>
             </a:pPr>
             <a:r>
-              <a:t>Search simulator logs with grep</a:t>
+              <a:t>• Search simulator logs with grep</a:t>
             </a:r>
           </a:p>
         </p:txBody>
@@ -4021,16 +4183,20 @@
           <a:noFill/>
         </p:spPr>
         <p:txBody>
-          <a:bodyPr wrap="none">
-            <a:spAutoFit/>
+          <a:bodyPr wrap="square">
+            <a:noAutofit/>
           </a:bodyPr>
           <a:lstStyle/>
           <a:p>
             <a:pPr algn="r">
-              <a:defRPr sz="1000">
+              <a:lnSpc>
+                <a:spcPts val="2200"/>
+              </a:lnSpc>
+              <a:defRPr sz="1000" b="0">
                 <a:solidFill>
                   <a:srgbClr val="666666"/>
                 </a:solidFill>
+                <a:latin typeface="Calibri"/>
               </a:defRPr>
             </a:pPr>
             <a:r>
@@ -4065,8 +4231,8 @@
         </p:nvSpPr>
         <p:spPr>
           <a:xfrm>
-            <a:off x="548640" y="457200"/>
-            <a:ext cx="11064240" cy="731520"/>
+            <a:off x="548640" y="411480"/>
+            <a:ext cx="11064240" cy="777240"/>
           </a:xfrm>
           <a:prstGeom prst="rect">
             <a:avLst/>
@@ -4074,16 +4240,20 @@
           <a:noFill/>
         </p:spPr>
         <p:txBody>
-          <a:bodyPr wrap="none">
-            <a:spAutoFit/>
+          <a:bodyPr wrap="square">
+            <a:noAutofit/>
           </a:bodyPr>
           <a:lstStyle/>
           <a:p>
             <a:pPr>
-              <a:defRPr sz="3200" b="1">
+              <a:lnSpc>
+                <a:spcPts val="2200"/>
+              </a:lnSpc>
+              <a:defRPr sz="2800" b="1">
                 <a:solidFill>
                   <a:srgbClr val="1A1A2E"/>
                 </a:solidFill>
+                <a:latin typeface="Calibri"/>
               </a:defRPr>
             </a:pPr>
             <a:r>
@@ -4100,8 +4270,8 @@
         </p:nvSpPr>
         <p:spPr>
           <a:xfrm>
-            <a:off x="548640" y="1280160"/>
-            <a:ext cx="11064240" cy="4754880"/>
+            <a:off x="548640" y="1234440"/>
+            <a:ext cx="11064240" cy="4937760"/>
           </a:xfrm>
           <a:prstGeom prst="rect">
             <a:avLst/>
@@ -4110,22 +4280,26 @@
         </p:spPr>
         <p:txBody>
           <a:bodyPr wrap="square">
-            <a:spAutoFit/>
+            <a:noAutofit/>
           </a:bodyPr>
           <a:lstStyle/>
           <a:p>
             <a:pPr>
+              <a:lnSpc>
+                <a:spcPts val="2200"/>
+              </a:lnSpc>
               <a:spcAft>
-                <a:spcPts val="800"/>
+                <a:spcPts val="1000"/>
               </a:spcAft>
-              <a:defRPr sz="2000">
+              <a:defRPr sz="2000" b="0">
                 <a:solidFill>
                   <a:srgbClr val="333333"/>
                 </a:solidFill>
+                <a:latin typeface="Calibri"/>
               </a:defRPr>
             </a:pPr>
             <a:r>
-              <a:t>Module 2 (permissions, executable scripts)</a:t>
+              <a:t>• Module 2 (permissions, executable scripts)</a:t>
             </a:r>
           </a:p>
         </p:txBody>
@@ -4147,16 +4321,20 @@
           <a:noFill/>
         </p:spPr>
         <p:txBody>
-          <a:bodyPr wrap="none">
-            <a:spAutoFit/>
+          <a:bodyPr wrap="square">
+            <a:noAutofit/>
           </a:bodyPr>
           <a:lstStyle/>
           <a:p>
             <a:pPr algn="r">
-              <a:defRPr sz="1000">
+              <a:lnSpc>
+                <a:spcPts val="2200"/>
+              </a:lnSpc>
+              <a:defRPr sz="1000" b="0">
                 <a:solidFill>
                   <a:srgbClr val="666666"/>
                 </a:solidFill>
+                <a:latin typeface="Calibri"/>
               </a:defRPr>
             </a:pPr>
             <a:r>
@@ -4191,8 +4369,8 @@
         </p:nvSpPr>
         <p:spPr>
           <a:xfrm>
-            <a:off x="548640" y="457200"/>
-            <a:ext cx="11064240" cy="731520"/>
+            <a:off x="548640" y="411480"/>
+            <a:ext cx="11064240" cy="777240"/>
           </a:xfrm>
           <a:prstGeom prst="rect">
             <a:avLst/>
@@ -4200,16 +4378,20 @@
           <a:noFill/>
         </p:spPr>
         <p:txBody>
-          <a:bodyPr wrap="none">
-            <a:spAutoFit/>
+          <a:bodyPr wrap="square">
+            <a:noAutofit/>
           </a:bodyPr>
           <a:lstStyle/>
           <a:p>
             <a:pPr>
-              <a:defRPr sz="3200" b="1">
+              <a:lnSpc>
+                <a:spcPts val="2200"/>
+              </a:lnSpc>
+              <a:defRPr sz="2800" b="1">
                 <a:solidFill>
                   <a:srgbClr val="1A1A2E"/>
                 </a:solidFill>
+                <a:latin typeface="Calibri"/>
               </a:defRPr>
             </a:pPr>
             <a:r>
@@ -4234,8 +4416,8 @@
         </p:blipFill>
         <p:spPr>
           <a:xfrm>
-            <a:off x="548640" y="1234440"/>
-            <a:ext cx="11064240" cy="4389120"/>
+            <a:off x="548640" y="1143000"/>
+            <a:ext cx="8128000" cy="4572000"/>
           </a:xfrm>
           <a:prstGeom prst="rect">
             <a:avLst/>
@@ -4259,16 +4441,20 @@
           <a:noFill/>
         </p:spPr>
         <p:txBody>
-          <a:bodyPr wrap="none">
-            <a:spAutoFit/>
+          <a:bodyPr wrap="square">
+            <a:noAutofit/>
           </a:bodyPr>
           <a:lstStyle/>
           <a:p>
             <a:pPr algn="r">
-              <a:defRPr sz="1000">
+              <a:lnSpc>
+                <a:spcPts val="2200"/>
+              </a:lnSpc>
+              <a:defRPr sz="1000" b="0">
                 <a:solidFill>
                   <a:srgbClr val="666666"/>
                 </a:solidFill>
+                <a:latin typeface="Calibri"/>
               </a:defRPr>
             </a:pPr>
             <a:r>
@@ -4303,8 +4489,8 @@
         </p:nvSpPr>
         <p:spPr>
           <a:xfrm>
-            <a:off x="548640" y="457200"/>
-            <a:ext cx="11064240" cy="731520"/>
+            <a:off x="548640" y="411480"/>
+            <a:ext cx="11064240" cy="777240"/>
           </a:xfrm>
           <a:prstGeom prst="rect">
             <a:avLst/>
@@ -4312,16 +4498,20 @@
           <a:noFill/>
         </p:spPr>
         <p:txBody>
-          <a:bodyPr wrap="none">
-            <a:spAutoFit/>
+          <a:bodyPr wrap="square">
+            <a:noAutofit/>
           </a:bodyPr>
           <a:lstStyle/>
           <a:p>
             <a:pPr>
-              <a:defRPr sz="3200" b="1">
+              <a:lnSpc>
+                <a:spcPts val="2200"/>
+              </a:lnSpc>
+              <a:defRPr sz="2800" b="1">
                 <a:solidFill>
                   <a:srgbClr val="1A1A2E"/>
                 </a:solidFill>
+                <a:latin typeface="Calibri"/>
               </a:defRPr>
             </a:pPr>
             <a:r>
@@ -4338,8 +4528,8 @@
         </p:nvSpPr>
         <p:spPr>
           <a:xfrm>
-            <a:off x="548640" y="1280160"/>
-            <a:ext cx="11064240" cy="4754880"/>
+            <a:off x="548640" y="1234440"/>
+            <a:ext cx="11064240" cy="4937760"/>
           </a:xfrm>
           <a:prstGeom prst="rect">
             <a:avLst/>
@@ -4348,52 +4538,64 @@
         </p:spPr>
         <p:txBody>
           <a:bodyPr wrap="square">
-            <a:spAutoFit/>
+            <a:noAutofit/>
           </a:bodyPr>
           <a:lstStyle/>
           <a:p>
             <a:pPr>
+              <a:lnSpc>
+                <a:spcPts val="2200"/>
+              </a:lnSpc>
               <a:spcAft>
-                <a:spcPts val="800"/>
+                <a:spcPts val="1000"/>
               </a:spcAft>
-              <a:defRPr sz="2000">
+              <a:defRPr sz="2000" b="0">
                 <a:solidFill>
                   <a:srgbClr val="333333"/>
                 </a:solidFill>
+                <a:latin typeface="Calibri"/>
               </a:defRPr>
             </a:pPr>
             <a:r>
-              <a:t>Save build/sim output: command &gt; run.log 2&gt;&amp;1</a:t>
+              <a:t>• Save build/sim output: command &gt; run.log 2&gt;&amp;1</a:t>
             </a:r>
           </a:p>
           <a:p>
             <a:pPr>
+              <a:lnSpc>
+                <a:spcPts val="2200"/>
+              </a:lnSpc>
               <a:spcAft>
-                <a:spcPts val="800"/>
+                <a:spcPts val="1000"/>
               </a:spcAft>
-              <a:defRPr sz="2000">
+              <a:defRPr sz="2000" b="0">
                 <a:solidFill>
                   <a:srgbClr val="333333"/>
                 </a:solidFill>
+                <a:latin typeface="Calibri"/>
               </a:defRPr>
             </a:pPr>
             <a:r>
-              <a:t>Filter errors: grep -i error run.log</a:t>
+              <a:t>• Filter errors: grep -i error run.log</a:t>
             </a:r>
           </a:p>
           <a:p>
             <a:pPr>
+              <a:lnSpc>
+                <a:spcPts val="2200"/>
+              </a:lnSpc>
               <a:spcAft>
-                <a:spcPts val="800"/>
+                <a:spcPts val="1000"/>
               </a:spcAft>
-              <a:defRPr sz="2000">
+              <a:defRPr sz="2000" b="0">
                 <a:solidFill>
                   <a:srgbClr val="333333"/>
                 </a:solidFill>
+                <a:latin typeface="Calibri"/>
               </a:defRPr>
             </a:pPr>
             <a:r>
-              <a:t>Exit status $? indicates success or failure</a:t>
+              <a:t>• Exit status $? indicates success or failure</a:t>
             </a:r>
           </a:p>
         </p:txBody>
@@ -4415,16 +4617,20 @@
           <a:noFill/>
         </p:spPr>
         <p:txBody>
-          <a:bodyPr wrap="none">
-            <a:spAutoFit/>
+          <a:bodyPr wrap="square">
+            <a:noAutofit/>
           </a:bodyPr>
           <a:lstStyle/>
           <a:p>
             <a:pPr algn="r">
-              <a:defRPr sz="1000">
+              <a:lnSpc>
+                <a:spcPts val="2200"/>
+              </a:lnSpc>
+              <a:defRPr sz="1000" b="0">
                 <a:solidFill>
                   <a:srgbClr val="666666"/>
                 </a:solidFill>
+                <a:latin typeface="Calibri"/>
               </a:defRPr>
             </a:pPr>
             <a:r>
@@ -4468,13 +4674,21 @@
           <a:noFill/>
         </p:spPr>
         <p:txBody>
-          <a:bodyPr wrap="none">
-            <a:spAutoFit/>
+          <a:bodyPr wrap="square">
+            <a:noAutofit/>
           </a:bodyPr>
           <a:lstStyle/>
           <a:p>
             <a:pPr algn="ctr">
-              <a:defRPr sz="4000" b="1"/>
+              <a:lnSpc>
+                <a:spcPts val="2200"/>
+              </a:lnSpc>
+              <a:defRPr sz="3600" b="1">
+                <a:solidFill>
+                  <a:srgbClr val="1A1A2E"/>
+                </a:solidFill>
+                <a:latin typeface="Calibri"/>
+              </a:defRPr>
             </a:pPr>
             <a:r>
               <a:t>Core topics</a:t>
@@ -4499,16 +4713,20 @@
           <a:noFill/>
         </p:spPr>
         <p:txBody>
-          <a:bodyPr wrap="none">
-            <a:spAutoFit/>
+          <a:bodyPr wrap="square">
+            <a:noAutofit/>
           </a:bodyPr>
           <a:lstStyle/>
           <a:p>
             <a:pPr algn="r">
-              <a:defRPr sz="1000">
+              <a:lnSpc>
+                <a:spcPts val="2200"/>
+              </a:lnSpc>
+              <a:defRPr sz="1000" b="0">
                 <a:solidFill>
                   <a:srgbClr val="666666"/>
                 </a:solidFill>
+                <a:latin typeface="Calibri"/>
               </a:defRPr>
             </a:pPr>
             <a:r>
@@ -4543,8 +4761,8 @@
         </p:nvSpPr>
         <p:spPr>
           <a:xfrm>
-            <a:off x="548640" y="457200"/>
-            <a:ext cx="11064240" cy="731520"/>
+            <a:off x="548640" y="411480"/>
+            <a:ext cx="11064240" cy="777240"/>
           </a:xfrm>
           <a:prstGeom prst="rect">
             <a:avLst/>
@@ -4552,16 +4770,20 @@
           <a:noFill/>
         </p:spPr>
         <p:txBody>
-          <a:bodyPr wrap="none">
-            <a:spAutoFit/>
+          <a:bodyPr wrap="square">
+            <a:noAutofit/>
           </a:bodyPr>
           <a:lstStyle/>
           <a:p>
             <a:pPr>
-              <a:defRPr sz="3200" b="1">
+              <a:lnSpc>
+                <a:spcPts val="2200"/>
+              </a:lnSpc>
+              <a:defRPr sz="2800" b="1">
                 <a:solidFill>
                   <a:srgbClr val="1A1A2E"/>
                 </a:solidFill>
+                <a:latin typeface="Calibri"/>
               </a:defRPr>
             </a:pPr>
             <a:r>
@@ -4578,22 +4800,33 @@
         </p:nvSpPr>
         <p:spPr>
           <a:xfrm>
-            <a:off x="548640" y="1143000"/>
-            <a:ext cx="11064240" cy="548640"/>
+            <a:off x="548640" y="1051560"/>
+            <a:ext cx="11064240" cy="914400"/>
           </a:xfrm>
           <a:prstGeom prst="rect">
             <a:avLst/>
           </a:prstGeom>
-          <a:noFill/>
-        </p:spPr>
-        <p:txBody>
-          <a:bodyPr wrap="none">
-            <a:spAutoFit/>
+          <a:solidFill>
+            <a:srgbClr val="F4F4F4"/>
+          </a:solidFill>
+        </p:spPr>
+        <p:txBody>
+          <a:bodyPr wrap="square">
+            <a:noAutofit/>
           </a:bodyPr>
           <a:lstStyle/>
           <a:p>
             <a:pPr>
-              <a:defRPr sz="1400">
+              <a:lnSpc>
+                <a:spcPts val="2200"/>
+              </a:lnSpc>
+              <a:spcAft>
+                <a:spcPts val="200"/>
+              </a:spcAft>
+              <a:defRPr sz="2000" b="0">
+                <a:solidFill>
+                  <a:srgbClr val="333333"/>
+                </a:solidFill>
                 <a:latin typeface="Consolas"/>
               </a:defRPr>
             </a:pPr>
@@ -4619,8 +4852,8 @@
         </p:blipFill>
         <p:spPr>
           <a:xfrm>
-            <a:off x="548640" y="1828800"/>
-            <a:ext cx="11064240" cy="3840480"/>
+            <a:off x="548640" y="1965960"/>
+            <a:ext cx="7071358" cy="3977639"/>
           </a:xfrm>
           <a:prstGeom prst="rect">
             <a:avLst/>
@@ -4644,16 +4877,20 @@
           <a:noFill/>
         </p:spPr>
         <p:txBody>
-          <a:bodyPr wrap="none">
-            <a:spAutoFit/>
+          <a:bodyPr wrap="square">
+            <a:noAutofit/>
           </a:bodyPr>
           <a:lstStyle/>
           <a:p>
             <a:pPr algn="r">
-              <a:defRPr sz="1000">
+              <a:lnSpc>
+                <a:spcPts val="2200"/>
+              </a:lnSpc>
+              <a:defRPr sz="1000" b="0">
                 <a:solidFill>
                   <a:srgbClr val="666666"/>
                 </a:solidFill>
+                <a:latin typeface="Calibri"/>
               </a:defRPr>
             </a:pPr>
             <a:r>
@@ -4688,8 +4925,8 @@
         </p:nvSpPr>
         <p:spPr>
           <a:xfrm>
-            <a:off x="548640" y="457200"/>
-            <a:ext cx="11064240" cy="731520"/>
+            <a:off x="548640" y="411480"/>
+            <a:ext cx="11064240" cy="777240"/>
           </a:xfrm>
           <a:prstGeom prst="rect">
             <a:avLst/>
@@ -4697,16 +4934,20 @@
           <a:noFill/>
         </p:spPr>
         <p:txBody>
-          <a:bodyPr wrap="none">
-            <a:spAutoFit/>
+          <a:bodyPr wrap="square">
+            <a:noAutofit/>
           </a:bodyPr>
           <a:lstStyle/>
           <a:p>
             <a:pPr>
-              <a:defRPr sz="3200" b="1">
+              <a:lnSpc>
+                <a:spcPts val="2200"/>
+              </a:lnSpc>
+              <a:defRPr sz="2800" b="1">
                 <a:solidFill>
                   <a:srgbClr val="1A1A2E"/>
                 </a:solidFill>
+                <a:latin typeface="Calibri"/>
               </a:defRPr>
             </a:pPr>
             <a:r>
@@ -4723,7 +4964,7 @@
         </p:nvSpPr>
         <p:spPr>
           <a:xfrm>
-            <a:off x="548640" y="1234440"/>
+            <a:off x="548640" y="1143000"/>
             <a:ext cx="11064240" cy="5029200"/>
           </a:xfrm>
           <a:prstGeom prst="rect">
@@ -4735,12 +4976,18 @@
         </p:spPr>
         <p:txBody>
           <a:bodyPr wrap="square">
-            <a:spAutoFit/>
+            <a:noAutofit/>
           </a:bodyPr>
           <a:lstStyle/>
           <a:p>
             <a:pPr>
-              <a:defRPr sz="1400">
+              <a:lnSpc>
+                <a:spcPts val="2200"/>
+              </a:lnSpc>
+              <a:spcAft>
+                <a:spcPts val="400"/>
+              </a:spcAft>
+              <a:defRPr sz="2000" b="0">
                 <a:solidFill>
                   <a:srgbClr val="333333"/>
                 </a:solidFill>
@@ -4750,7 +4997,22 @@
             <a:r>
               <a:t>./scripts/run_tests.sh &gt; logs/run.log 2&gt;&amp;1</a:t>
             </a:r>
-            <a:br/>
+          </a:p>
+          <a:p>
+            <a:pPr>
+              <a:lnSpc>
+                <a:spcPts val="2200"/>
+              </a:lnSpc>
+              <a:spcAft>
+                <a:spcPts val="400"/>
+              </a:spcAft>
+              <a:defRPr sz="2000" b="0">
+                <a:solidFill>
+                  <a:srgbClr val="333333"/>
+                </a:solidFill>
+                <a:latin typeface="Consolas"/>
+              </a:defRPr>
+            </a:pPr>
             <a:r>
               <a:t>tail -f logs/run.log</a:t>
             </a:r>
@@ -4774,16 +5036,20 @@
           <a:noFill/>
         </p:spPr>
         <p:txBody>
-          <a:bodyPr wrap="none">
-            <a:spAutoFit/>
+          <a:bodyPr wrap="square">
+            <a:noAutofit/>
           </a:bodyPr>
           <a:lstStyle/>
           <a:p>
             <a:pPr algn="r">
-              <a:defRPr sz="1000">
+              <a:lnSpc>
+                <a:spcPts val="2200"/>
+              </a:lnSpc>
+              <a:defRPr sz="1000" b="0">
                 <a:solidFill>
                   <a:srgbClr val="666666"/>
                 </a:solidFill>
+                <a:latin typeface="Calibri"/>
               </a:defRPr>
             </a:pPr>
             <a:r>
@@ -4818,8 +5084,8 @@
         </p:nvSpPr>
         <p:spPr>
           <a:xfrm>
-            <a:off x="548640" y="457200"/>
-            <a:ext cx="11064240" cy="731520"/>
+            <a:off x="548640" y="411480"/>
+            <a:ext cx="11064240" cy="777240"/>
           </a:xfrm>
           <a:prstGeom prst="rect">
             <a:avLst/>
@@ -4827,16 +5093,20 @@
           <a:noFill/>
         </p:spPr>
         <p:txBody>
-          <a:bodyPr wrap="none">
-            <a:spAutoFit/>
+          <a:bodyPr wrap="square">
+            <a:noAutofit/>
           </a:bodyPr>
           <a:lstStyle/>
           <a:p>
             <a:pPr>
-              <a:defRPr sz="3200" b="1">
+              <a:lnSpc>
+                <a:spcPts val="2200"/>
+              </a:lnSpc>
+              <a:defRPr sz="2800" b="1">
                 <a:solidFill>
                   <a:srgbClr val="1A1A2E"/>
                 </a:solidFill>
+                <a:latin typeface="Calibri"/>
               </a:defRPr>
             </a:pPr>
             <a:r>
@@ -4853,22 +5123,33 @@
         </p:nvSpPr>
         <p:spPr>
           <a:xfrm>
-            <a:off x="548640" y="1143000"/>
-            <a:ext cx="11064240" cy="548640"/>
+            <a:off x="548640" y="1051560"/>
+            <a:ext cx="11064240" cy="914400"/>
           </a:xfrm>
           <a:prstGeom prst="rect">
             <a:avLst/>
           </a:prstGeom>
-          <a:noFill/>
-        </p:spPr>
-        <p:txBody>
-          <a:bodyPr wrap="none">
-            <a:spAutoFit/>
+          <a:solidFill>
+            <a:srgbClr val="F4F4F4"/>
+          </a:solidFill>
+        </p:spPr>
+        <p:txBody>
+          <a:bodyPr wrap="square">
+            <a:noAutofit/>
           </a:bodyPr>
           <a:lstStyle/>
           <a:p>
             <a:pPr>
-              <a:defRPr sz="1400">
+              <a:lnSpc>
+                <a:spcPts val="2200"/>
+              </a:lnSpc>
+              <a:spcAft>
+                <a:spcPts val="200"/>
+              </a:spcAft>
+              <a:defRPr sz="2000" b="0">
+                <a:solidFill>
+                  <a:srgbClr val="333333"/>
+                </a:solidFill>
                 <a:latin typeface="Consolas"/>
               </a:defRPr>
             </a:pPr>
@@ -4894,8 +5175,8 @@
         </p:blipFill>
         <p:spPr>
           <a:xfrm>
-            <a:off x="548640" y="1828800"/>
-            <a:ext cx="11064240" cy="3840480"/>
+            <a:off x="548640" y="1965960"/>
+            <a:ext cx="7071358" cy="3977639"/>
           </a:xfrm>
           <a:prstGeom prst="rect">
             <a:avLst/>
@@ -4919,16 +5200,20 @@
           <a:noFill/>
         </p:spPr>
         <p:txBody>
-          <a:bodyPr wrap="none">
-            <a:spAutoFit/>
+          <a:bodyPr wrap="square">
+            <a:noAutofit/>
           </a:bodyPr>
           <a:lstStyle/>
           <a:p>
             <a:pPr algn="r">
-              <a:defRPr sz="1000">
+              <a:lnSpc>
+                <a:spcPts val="2200"/>
+              </a:lnSpc>
+              <a:defRPr sz="1000" b="0">
                 <a:solidFill>
                   <a:srgbClr val="666666"/>
                 </a:solidFill>
+                <a:latin typeface="Calibri"/>
               </a:defRPr>
             </a:pPr>
             <a:r>
